--- a/builder/assets/reference-pages/market-funnel.pptx
+++ b/builder/assets/reference-pages/market-funnel.pptx
@@ -1097,7 +1097,7 @@
                   <a:srgbClr val="15375F"/>
                 </a:solidFill>
               </a:rPr>
-              <a:t>总体市场 50 亿中，可实际触达 12 亿，三年可获取 6 亿</a:t>
+              <a:t>overall market 50 100 million, can be actually reached 12 billion, available in three years 6 billion</a:t>
             </a:r>
           </a:p>
         </p:txBody>
@@ -1223,7 +1223,7 @@
                   <a:srgbClr val="FFFFFF"/>
                 </a:solidFill>
               </a:rPr>
-              <a:t>TAM｜总体市场  50</a:t>
+              <a:t>TAM｜overall market  50</a:t>
             </a:r>
           </a:p>
           <a:p xmlns:a="http://schemas.openxmlformats.org/drawingml/2006/main">
@@ -1240,7 +1240,7 @@
                   <a:srgbClr val="FFFFFF"/>
                 </a:solidFill>
               </a:rPr>
-              <a:t>占上一层 100%｜剔除非目标行业</a:t>
+              <a:t>Take up one floor 100%｜Eliminate non-target industries</a:t>
             </a:r>
           </a:p>
         </p:txBody>
@@ -1327,7 +1327,7 @@
                   <a:srgbClr val="FFFFFF"/>
                 </a:solidFill>
               </a:rPr>
-              <a:t>SAM｜可服务市场  24</a:t>
+              <a:t>SAM｜Serviceable market  24</a:t>
             </a:r>
           </a:p>
           <a:p xmlns:a="http://schemas.openxmlformats.org/drawingml/2006/main">
@@ -1344,7 +1344,7 @@
                   <a:srgbClr val="FFFFFF"/>
                 </a:solidFill>
               </a:rPr>
-              <a:t>占上一层 48%｜剔除不适配产品场景</a:t>
+              <a:t>Take up one floor 48%｜Eliminate unsuitable product scenarios</a:t>
             </a:r>
           </a:p>
         </p:txBody>
@@ -1431,7 +1431,7 @@
                   <a:srgbClr val="FFFFFF"/>
                 </a:solidFill>
               </a:rPr>
-              <a:t>SOM｜可获取市场  12</a:t>
+              <a:t>SOM｜market available  12</a:t>
             </a:r>
           </a:p>
           <a:p xmlns:a="http://schemas.openxmlformats.org/drawingml/2006/main">
@@ -1448,7 +1448,7 @@
                   <a:srgbClr val="FFFFFF"/>
                 </a:solidFill>
               </a:rPr>
-              <a:t>占上一层 50%｜受渠道与交付能力约束</a:t>
+              <a:t>Take up one floor 50%｜Constrained by channels and delivery capabilities</a:t>
             </a:r>
           </a:p>
         </p:txBody>
@@ -1535,7 +1535,7 @@
                   <a:srgbClr val="FFFFFF"/>
                 </a:solidFill>
               </a:rPr>
-              <a:t>三年目标  6</a:t>
+              <a:t>Three-year goals  6</a:t>
             </a:r>
           </a:p>
           <a:p xmlns:a="http://schemas.openxmlformats.org/drawingml/2006/main">
@@ -1552,7 +1552,7 @@
                   <a:srgbClr val="FFFFFF"/>
                 </a:solidFill>
               </a:rPr>
-              <a:t>占上一层 50%｜按现实渗透速度收敛</a:t>
+              <a:t>Take up one floor 50%｜Convergence according to realistic penetration speed</a:t>
             </a:r>
           </a:p>
         </p:txBody>
@@ -1602,7 +1602,7 @@
                   <a:srgbClr val="15375F"/>
                 </a:solidFill>
               </a:rPr>
-              <a:t>测算逻辑</a:t>
+              <a:t>Calculation logic</a:t>
             </a:r>
           </a:p>
         </p:txBody>
@@ -1658,7 +1658,7 @@
                   <a:srgbClr val="172033"/>
                 </a:solidFill>
               </a:rPr>
-              <a:t>目标客户数</a:t>
+              <a:t>Number of target customers</a:t>
             </a:r>
           </a:p>
           <a:p xmlns:a="http://schemas.openxmlformats.org/drawingml/2006/main">
@@ -1675,7 +1675,7 @@
                   <a:srgbClr val="172033"/>
                 </a:solidFill>
               </a:rPr>
-              <a:t>2,000 家</a:t>
+              <a:t>2,000 home</a:t>
             </a:r>
           </a:p>
           <a:p xmlns:a="http://schemas.openxmlformats.org/drawingml/2006/main">
@@ -1692,7 +1692,7 @@
                   <a:srgbClr val="172033"/>
                 </a:solidFill>
               </a:rPr>
-              <a:t>敏感度 中</a:t>
+              <a:t>sensitivity in</a:t>
             </a:r>
           </a:p>
           <a:p xmlns:a="http://schemas.openxmlformats.org/drawingml/2006/main">
@@ -1709,7 +1709,7 @@
                   <a:srgbClr val="172033"/>
                 </a:solidFill>
               </a:rPr>
-              <a:t>来源：行业名录</a:t>
+              <a:t>Source: Industry Directory</a:t>
             </a:r>
           </a:p>
         </p:txBody>
@@ -1765,7 +1765,7 @@
                   <a:srgbClr val="172033"/>
                 </a:solidFill>
               </a:rPr>
-              <a:t>渗透率</a:t>
+              <a:t>Penetration</a:t>
             </a:r>
           </a:p>
           <a:p xmlns:a="http://schemas.openxmlformats.org/drawingml/2006/main">
@@ -1799,7 +1799,7 @@
                   <a:srgbClr val="172033"/>
                 </a:solidFill>
               </a:rPr>
-              <a:t>敏感度 高</a:t>
+              <a:t>sensitivity high</a:t>
             </a:r>
           </a:p>
           <a:p xmlns:a="http://schemas.openxmlformats.org/drawingml/2006/main">
@@ -1816,7 +1816,7 @@
                   <a:srgbClr val="172033"/>
                 </a:solidFill>
               </a:rPr>
-              <a:t>来源：试点转化</a:t>
+              <a:t>Source: Pilot Transformation</a:t>
             </a:r>
           </a:p>
         </p:txBody>
@@ -1903,7 +1903,7 @@
                   <a:srgbClr val="172033"/>
                 </a:solidFill>
               </a:rPr>
-              <a:t>年客单价</a:t>
+              <a:t>Annual customer unit price</a:t>
             </a:r>
           </a:p>
           <a:p xmlns:a="http://schemas.openxmlformats.org/drawingml/2006/main">
@@ -1920,7 +1920,7 @@
                   <a:srgbClr val="172033"/>
                 </a:solidFill>
               </a:rPr>
-              <a:t>160 万</a:t>
+              <a:t>160 million</a:t>
             </a:r>
           </a:p>
           <a:p xmlns:a="http://schemas.openxmlformats.org/drawingml/2006/main">
@@ -1937,7 +1937,7 @@
                   <a:srgbClr val="172033"/>
                 </a:solidFill>
               </a:rPr>
-              <a:t>敏感度 高</a:t>
+              <a:t>sensitivity high</a:t>
             </a:r>
           </a:p>
           <a:p xmlns:a="http://schemas.openxmlformats.org/drawingml/2006/main">
@@ -1954,7 +1954,7 @@
                   <a:srgbClr val="172033"/>
                 </a:solidFill>
               </a:rPr>
-              <a:t>来源：合同样本</a:t>
+              <a:t>Source: Contract Sample</a:t>
             </a:r>
           </a:p>
         </p:txBody>
@@ -2041,7 +2041,7 @@
                   <a:srgbClr val="172033"/>
                 </a:solidFill>
               </a:rPr>
-              <a:t>复购率</a:t>
+              <a:t>Repurchase rate</a:t>
             </a:r>
           </a:p>
           <a:p xmlns:a="http://schemas.openxmlformats.org/drawingml/2006/main">
@@ -2075,7 +2075,7 @@
                   <a:srgbClr val="172033"/>
                 </a:solidFill>
               </a:rPr>
-              <a:t>敏感度 中</a:t>
+              <a:t>sensitivity in</a:t>
             </a:r>
           </a:p>
           <a:p xmlns:a="http://schemas.openxmlformats.org/drawingml/2006/main">
@@ -2092,7 +2092,7 @@
                   <a:srgbClr val="172033"/>
                 </a:solidFill>
               </a:rPr>
-              <a:t>来源：续约数据</a:t>
+              <a:t>Source: Renewal data</a:t>
             </a:r>
           </a:p>
         </p:txBody>
@@ -2179,7 +2179,7 @@
                   <a:srgbClr val="15375F"/>
                 </a:solidFill>
               </a:rPr>
-              <a:t>第 1/2/3 年收入目标：1.2 / 3.2 / 6.0 亿元</a:t>
+              <a:t>No. 1/2/3 Annual income target:1.2 / 3.2 / 6.0 billion</a:t>
             </a:r>
           </a:p>
         </p:txBody>
@@ -2229,7 +2229,7 @@
                   <a:srgbClr val="172033"/>
                 </a:solidFill>
               </a:rPr>
-              <a:t>• 客户名录每半年更新一次</a:t>
+              <a:t>• The customer list is updated every six months</a:t>
             </a:r>
           </a:p>
         </p:txBody>
@@ -2279,7 +2279,7 @@
                   <a:srgbClr val="172033"/>
                 </a:solidFill>
               </a:rPr>
-              <a:t>• 渗透率以已签约客户为准</a:t>
+              <a:t>• Penetration rate is based on signed customers</a:t>
             </a:r>
           </a:p>
         </p:txBody>
@@ -2329,7 +2329,7 @@
                   <a:srgbClr val="172033"/>
                 </a:solidFill>
               </a:rPr>
-              <a:t>• 测算日期：2026 年 8 月</a:t>
+              <a:t>• Calculation date:2026 year 8 month</a:t>
             </a:r>
           </a:p>
         </p:txBody>
@@ -2385,7 +2385,7 @@
                   <a:srgbClr val="15375F"/>
                 </a:solidFill>
               </a:rPr>
-              <a:t>优先验证渗透率和客单价，两项决定 78% 的结果波动</a:t>
+              <a:t>Prioritize verification of penetration rate and customer unit price, two decisions 78% The results fluctuate</a:t>
             </a:r>
           </a:p>
         </p:txBody>
